--- a/现场布局图.pptx
+++ b/现场布局图.pptx
@@ -244,7 +244,7 @@
           <a:p>
             <a:fld id="{06F60DB7-6E48-4466-B7A9-24611520A472}" type="datetimeFigureOut">
               <a:rPr lang="zh-CN" altLang="en-US" smtClean="0"/>
-              <a:t>2026/4/17</a:t>
+              <a:t>2026/5/12</a:t>
             </a:fld>
             <a:endParaRPr lang="zh-CN" altLang="en-US"/>
           </a:p>
@@ -414,7 +414,7 @@
           <a:p>
             <a:fld id="{06F60DB7-6E48-4466-B7A9-24611520A472}" type="datetimeFigureOut">
               <a:rPr lang="zh-CN" altLang="en-US" smtClean="0"/>
-              <a:t>2026/4/17</a:t>
+              <a:t>2026/5/12</a:t>
             </a:fld>
             <a:endParaRPr lang="zh-CN" altLang="en-US"/>
           </a:p>
@@ -594,7 +594,7 @@
           <a:p>
             <a:fld id="{06F60DB7-6E48-4466-B7A9-24611520A472}" type="datetimeFigureOut">
               <a:rPr lang="zh-CN" altLang="en-US" smtClean="0"/>
-              <a:t>2026/4/17</a:t>
+              <a:t>2026/5/12</a:t>
             </a:fld>
             <a:endParaRPr lang="zh-CN" altLang="en-US"/>
           </a:p>
@@ -764,7 +764,7 @@
           <a:p>
             <a:fld id="{06F60DB7-6E48-4466-B7A9-24611520A472}" type="datetimeFigureOut">
               <a:rPr lang="zh-CN" altLang="en-US" smtClean="0"/>
-              <a:t>2026/4/17</a:t>
+              <a:t>2026/5/12</a:t>
             </a:fld>
             <a:endParaRPr lang="zh-CN" altLang="en-US"/>
           </a:p>
@@ -1010,7 +1010,7 @@
           <a:p>
             <a:fld id="{06F60DB7-6E48-4466-B7A9-24611520A472}" type="datetimeFigureOut">
               <a:rPr lang="zh-CN" altLang="en-US" smtClean="0"/>
-              <a:t>2026/4/17</a:t>
+              <a:t>2026/5/12</a:t>
             </a:fld>
             <a:endParaRPr lang="zh-CN" altLang="en-US"/>
           </a:p>
@@ -1242,7 +1242,7 @@
           <a:p>
             <a:fld id="{06F60DB7-6E48-4466-B7A9-24611520A472}" type="datetimeFigureOut">
               <a:rPr lang="zh-CN" altLang="en-US" smtClean="0"/>
-              <a:t>2026/4/17</a:t>
+              <a:t>2026/5/12</a:t>
             </a:fld>
             <a:endParaRPr lang="zh-CN" altLang="en-US"/>
           </a:p>
@@ -1609,7 +1609,7 @@
           <a:p>
             <a:fld id="{06F60DB7-6E48-4466-B7A9-24611520A472}" type="datetimeFigureOut">
               <a:rPr lang="zh-CN" altLang="en-US" smtClean="0"/>
-              <a:t>2026/4/17</a:t>
+              <a:t>2026/5/12</a:t>
             </a:fld>
             <a:endParaRPr lang="zh-CN" altLang="en-US"/>
           </a:p>
@@ -1727,7 +1727,7 @@
           <a:p>
             <a:fld id="{06F60DB7-6E48-4466-B7A9-24611520A472}" type="datetimeFigureOut">
               <a:rPr lang="zh-CN" altLang="en-US" smtClean="0"/>
-              <a:t>2026/4/17</a:t>
+              <a:t>2026/5/12</a:t>
             </a:fld>
             <a:endParaRPr lang="zh-CN" altLang="en-US"/>
           </a:p>
@@ -1822,7 +1822,7 @@
           <a:p>
             <a:fld id="{06F60DB7-6E48-4466-B7A9-24611520A472}" type="datetimeFigureOut">
               <a:rPr lang="zh-CN" altLang="en-US" smtClean="0"/>
-              <a:t>2026/4/17</a:t>
+              <a:t>2026/5/12</a:t>
             </a:fld>
             <a:endParaRPr lang="zh-CN" altLang="en-US"/>
           </a:p>
@@ -2099,7 +2099,7 @@
           <a:p>
             <a:fld id="{06F60DB7-6E48-4466-B7A9-24611520A472}" type="datetimeFigureOut">
               <a:rPr lang="zh-CN" altLang="en-US" smtClean="0"/>
-              <a:t>2026/4/17</a:t>
+              <a:t>2026/5/12</a:t>
             </a:fld>
             <a:endParaRPr lang="zh-CN" altLang="en-US"/>
           </a:p>
@@ -2356,7 +2356,7 @@
           <a:p>
             <a:fld id="{06F60DB7-6E48-4466-B7A9-24611520A472}" type="datetimeFigureOut">
               <a:rPr lang="zh-CN" altLang="en-US" smtClean="0"/>
-              <a:t>2026/4/17</a:t>
+              <a:t>2026/5/12</a:t>
             </a:fld>
             <a:endParaRPr lang="zh-CN" altLang="en-US"/>
           </a:p>
@@ -2569,7 +2569,7 @@
           <a:p>
             <a:fld id="{06F60DB7-6E48-4466-B7A9-24611520A472}" type="datetimeFigureOut">
               <a:rPr lang="zh-CN" altLang="en-US" smtClean="0"/>
-              <a:t>2026/4/17</a:t>
+              <a:t>2026/5/12</a:t>
             </a:fld>
             <a:endParaRPr lang="zh-CN" altLang="en-US"/>
           </a:p>
@@ -16258,8 +16258,8 @@
           </p:nvSpPr>
           <p:spPr>
             <a:xfrm rot="18840000">
-              <a:off x="17011" y="4079"/>
-              <a:ext cx="808" cy="406"/>
+              <a:off x="16995" y="4042"/>
+              <a:ext cx="910" cy="406"/>
             </a:xfrm>
             <a:custGeom>
               <a:avLst/>
@@ -16396,7 +16396,7 @@
                   <a:ea typeface="微软雅黑" panose="020B0503020204020204" charset="-122"/>
                   <a:cs typeface="微软雅黑" panose="020B0503020204020204" charset="-122"/>
                 </a:rPr>
-                <a:t>临</a:t>
+                <a:t>机北</a:t>
               </a:r>
               <a:r>
                 <a:rPr lang="en-US" altLang="zh-CN" sz="1000" b="1" dirty="0">
@@ -16710,168 +16710,6 @@
                   <a:cs typeface="微软雅黑" panose="020B0503020204020204" charset="-122"/>
                 </a:rPr>
                 <a:t>存5南</a:t>
-              </a:r>
-            </a:p>
-          </p:txBody>
-        </p:sp>
-        <p:sp>
-          <p:nvSpPr>
-            <p:cNvPr id="9" name="标签"/>
-            <p:cNvSpPr/>
-            <p:nvPr/>
-          </p:nvSpPr>
-          <p:spPr>
-            <a:xfrm rot="18480000">
-              <a:off x="14590" y="5720"/>
-              <a:ext cx="962" cy="342"/>
-            </a:xfrm>
-            <a:custGeom>
-              <a:avLst/>
-              <a:gdLst>
-                <a:gd name="connsiteX0" fmla="*/ 0 w 466771"/>
-                <a:gd name="connsiteY0" fmla="*/ 98800 h 197600"/>
-                <a:gd name="connsiteX1" fmla="*/ 233386 w 466771"/>
-                <a:gd name="connsiteY1" fmla="*/ 0 h 197600"/>
-                <a:gd name="connsiteX2" fmla="*/ 466771 w 466771"/>
-                <a:gd name="connsiteY2" fmla="*/ 98800 h 197600"/>
-                <a:gd name="connsiteX3" fmla="*/ 233386 w 466771"/>
-                <a:gd name="connsiteY3" fmla="*/ 197600 h 197600"/>
-                <a:gd name="rtl" fmla="*/ 30400 w 466771"/>
-                <a:gd name="rtt" fmla="*/ 30400 h 197600"/>
-                <a:gd name="rtr" fmla="*/ 436372 w 466771"/>
-                <a:gd name="rtb" fmla="*/ 167200 h 197600"/>
-              </a:gdLst>
-              <a:ahLst/>
-              <a:cxnLst>
-                <a:cxn ang="10800000">
-                  <a:pos x="connsiteX0" y="connsiteY0"/>
-                </a:cxn>
-                <a:cxn ang="16200000">
-                  <a:pos x="connsiteX1" y="connsiteY1"/>
-                </a:cxn>
-                <a:cxn ang="0">
-                  <a:pos x="connsiteX2" y="connsiteY2"/>
-                </a:cxn>
-                <a:cxn ang="5400000">
-                  <a:pos x="connsiteX3" y="connsiteY3"/>
-                </a:cxn>
-              </a:cxnLst>
-              <a:rect l="rtl" t="rtt" r="rtr" b="rtb"/>
-              <a:pathLst>
-                <a:path w="466771" h="197600" stroke="0">
-                  <a:moveTo>
-                    <a:pt x="35568" y="0"/>
-                  </a:moveTo>
-                  <a:lnTo>
-                    <a:pt x="431203" y="0"/>
-                  </a:lnTo>
-                  <a:cubicBezTo>
-                    <a:pt x="450848" y="0"/>
-                    <a:pt x="466771" y="15924"/>
-                    <a:pt x="466771" y="35568"/>
-                  </a:cubicBezTo>
-                  <a:lnTo>
-                    <a:pt x="466771" y="162032"/>
-                  </a:lnTo>
-                  <a:cubicBezTo>
-                    <a:pt x="466771" y="181676"/>
-                    <a:pt x="450848" y="197600"/>
-                    <a:pt x="431203" y="197600"/>
-                  </a:cubicBezTo>
-                  <a:lnTo>
-                    <a:pt x="35568" y="197600"/>
-                  </a:lnTo>
-                  <a:cubicBezTo>
-                    <a:pt x="15924" y="197600"/>
-                    <a:pt x="0" y="181676"/>
-                    <a:pt x="0" y="162032"/>
-                  </a:cubicBezTo>
-                  <a:lnTo>
-                    <a:pt x="0" y="35568"/>
-                  </a:lnTo>
-                  <a:cubicBezTo>
-                    <a:pt x="0" y="15924"/>
-                    <a:pt x="15924" y="0"/>
-                    <a:pt x="35568" y="0"/>
-                  </a:cubicBezTo>
-                  <a:close/>
-                </a:path>
-                <a:path w="466771" h="197600" fill="none">
-                  <a:moveTo>
-                    <a:pt x="35568" y="0"/>
-                  </a:moveTo>
-                  <a:lnTo>
-                    <a:pt x="431203" y="0"/>
-                  </a:lnTo>
-                  <a:cubicBezTo>
-                    <a:pt x="450848" y="0"/>
-                    <a:pt x="466771" y="15924"/>
-                    <a:pt x="466771" y="35568"/>
-                  </a:cubicBezTo>
-                  <a:lnTo>
-                    <a:pt x="466771" y="162032"/>
-                  </a:lnTo>
-                  <a:cubicBezTo>
-                    <a:pt x="466771" y="181676"/>
-                    <a:pt x="450848" y="197600"/>
-                    <a:pt x="431203" y="197600"/>
-                  </a:cubicBezTo>
-                  <a:lnTo>
-                    <a:pt x="35568" y="197600"/>
-                  </a:lnTo>
-                  <a:cubicBezTo>
-                    <a:pt x="15924" y="197600"/>
-                    <a:pt x="0" y="181676"/>
-                    <a:pt x="0" y="162032"/>
-                  </a:cubicBezTo>
-                  <a:lnTo>
-                    <a:pt x="0" y="35568"/>
-                  </a:lnTo>
-                  <a:cubicBezTo>
-                    <a:pt x="0" y="15924"/>
-                    <a:pt x="15924" y="0"/>
-                    <a:pt x="35568" y="0"/>
-                  </a:cubicBezTo>
-                  <a:close/>
-                </a:path>
-              </a:pathLst>
-            </a:custGeom>
-            <a:solidFill>
-              <a:schemeClr val="accent4"/>
-            </a:solidFill>
-            <a:ln w="7600" cap="flat">
-              <a:solidFill>
-                <a:srgbClr val="4155C6"/>
-              </a:solidFill>
-              <a:miter/>
-            </a:ln>
-          </p:spPr>
-          <p:txBody>
-            <a:bodyPr wrap="square" lIns="76200" tIns="38100" rIns="76200" bIns="38100" rtlCol="0" anchor="ctr"/>
-            <a:lstStyle/>
-            <a:p>
-              <a:pPr algn="ctr"/>
-              <a:r>
-                <a:rPr lang="zh-CN" altLang="en-US" sz="1000" b="1" dirty="0">
-                  <a:solidFill>
-                    <a:srgbClr val="191919"/>
-                  </a:solidFill>
-                  <a:latin typeface="微软雅黑" panose="020B0503020204020204" charset="-122"/>
-                  <a:ea typeface="微软雅黑" panose="020B0503020204020204" charset="-122"/>
-                  <a:cs typeface="微软雅黑" panose="020B0503020204020204" charset="-122"/>
-                </a:rPr>
-                <a:t>临</a:t>
-              </a:r>
-              <a:r>
-                <a:rPr lang="en-US" altLang="zh-CN" sz="1000" b="1" dirty="0">
-                  <a:solidFill>
-                    <a:srgbClr val="191919"/>
-                  </a:solidFill>
-                  <a:latin typeface="微软雅黑" panose="020B0503020204020204" charset="-122"/>
-                  <a:ea typeface="微软雅黑" panose="020B0503020204020204" charset="-122"/>
-                  <a:cs typeface="微软雅黑" panose="020B0503020204020204" charset="-122"/>
-                </a:rPr>
-                <a:t>2</a:t>
               </a:r>
             </a:p>
           </p:txBody>
@@ -17544,8 +17382,8 @@
           </p:nvSpPr>
           <p:spPr>
             <a:xfrm rot="19800000">
-              <a:off x="4144" y="6359"/>
-              <a:ext cx="962" cy="342"/>
+              <a:off x="4136" y="6328"/>
+              <a:ext cx="1086" cy="342"/>
             </a:xfrm>
             <a:custGeom>
               <a:avLst/>
@@ -17682,19 +17520,16 @@
                   <a:ea typeface="微软雅黑" panose="020B0503020204020204" charset="-122"/>
                   <a:cs typeface="微软雅黑" panose="020B0503020204020204" charset="-122"/>
                 </a:rPr>
-                <a:t>临</a:t>
+                <a:t>洗油北</a:t>
               </a:r>
-              <a:r>
-                <a:rPr lang="en-US" altLang="zh-CN" sz="1000" b="1" dirty="0">
-                  <a:solidFill>
-                    <a:srgbClr val="191919"/>
-                  </a:solidFill>
-                  <a:latin typeface="微软雅黑" panose="020B0503020204020204" charset="-122"/>
-                  <a:ea typeface="微软雅黑" panose="020B0503020204020204" charset="-122"/>
-                  <a:cs typeface="微软雅黑" panose="020B0503020204020204" charset="-122"/>
-                </a:rPr>
-                <a:t>3</a:t>
-              </a:r>
+              <a:endParaRPr lang="en-US" altLang="zh-CN" sz="1000" b="1" dirty="0">
+                <a:solidFill>
+                  <a:srgbClr val="191919"/>
+                </a:solidFill>
+                <a:latin typeface="微软雅黑" panose="020B0503020204020204" charset="-122"/>
+                <a:ea typeface="微软雅黑" panose="020B0503020204020204" charset="-122"/>
+                <a:cs typeface="微软雅黑" panose="020B0503020204020204" charset="-122"/>
+              </a:endParaRPr>
             </a:p>
           </p:txBody>
         </p:sp>
@@ -17844,19 +17679,16 @@
                   <a:ea typeface="微软雅黑" panose="020B0503020204020204" charset="-122"/>
                   <a:cs typeface="微软雅黑" panose="020B0503020204020204" charset="-122"/>
                 </a:rPr>
-                <a:t>临</a:t>
+                <a:t>机南</a:t>
               </a:r>
-              <a:r>
-                <a:rPr lang="en-US" altLang="zh-CN" sz="1000" b="1" dirty="0">
-                  <a:solidFill>
-                    <a:srgbClr val="191919"/>
-                  </a:solidFill>
-                  <a:latin typeface="微软雅黑" panose="020B0503020204020204" charset="-122"/>
-                  <a:ea typeface="微软雅黑" panose="020B0503020204020204" charset="-122"/>
-                  <a:cs typeface="微软雅黑" panose="020B0503020204020204" charset="-122"/>
-                </a:rPr>
-                <a:t>4</a:t>
-              </a:r>
+              <a:endParaRPr lang="en-US" altLang="zh-CN" sz="1000" b="1" dirty="0">
+                <a:solidFill>
+                  <a:srgbClr val="191919"/>
+                </a:solidFill>
+                <a:latin typeface="微软雅黑" panose="020B0503020204020204" charset="-122"/>
+                <a:ea typeface="微软雅黑" panose="020B0503020204020204" charset="-122"/>
+                <a:cs typeface="微软雅黑" panose="020B0503020204020204" charset="-122"/>
+              </a:endParaRPr>
             </a:p>
           </p:txBody>
         </p:sp>
@@ -25379,7 +25211,7 @@
         </p:nvSpPr>
         <p:spPr>
           <a:xfrm>
-            <a:off x="13058309" y="4011905"/>
+            <a:off x="13361967" y="3987190"/>
             <a:ext cx="533173" cy="217170"/>
           </a:xfrm>
           <a:custGeom>
@@ -25767,8 +25599,8 @@
         </p:nvSpPr>
         <p:spPr>
           <a:xfrm>
-            <a:off x="13132171" y="3413825"/>
-            <a:ext cx="533173" cy="217170"/>
+            <a:off x="13361967" y="3387061"/>
+            <a:ext cx="586862" cy="217170"/>
           </a:xfrm>
           <a:custGeom>
             <a:avLst/>
@@ -25907,6 +25739,25 @@
               </a:rPr>
               <a:t>机北</a:t>
             </a:r>
+            <a:r>
+              <a:rPr lang="en-US" altLang="zh-CN" sz="1000" b="1" dirty="0">
+                <a:solidFill>
+                  <a:srgbClr val="191919"/>
+                </a:solidFill>
+                <a:latin typeface="微软雅黑" panose="020B0503020204020204" charset="-122"/>
+                <a:ea typeface="微软雅黑" panose="020B0503020204020204" charset="-122"/>
+                <a:cs typeface="微软雅黑" panose="020B0503020204020204" charset="-122"/>
+              </a:rPr>
+              <a:t>3</a:t>
+            </a:r>
+            <a:endParaRPr lang="zh-CN" altLang="en-US" sz="1000" b="1" dirty="0">
+              <a:solidFill>
+                <a:srgbClr val="191919"/>
+              </a:solidFill>
+              <a:latin typeface="微软雅黑" panose="020B0503020204020204" charset="-122"/>
+              <a:ea typeface="微软雅黑" panose="020B0503020204020204" charset="-122"/>
+              <a:cs typeface="微软雅黑" panose="020B0503020204020204" charset="-122"/>
+            </a:endParaRPr>
           </a:p>
         </p:txBody>
       </p:sp>
@@ -27869,6 +27720,174 @@
           </a:p>
         </p:txBody>
       </p:sp>
+      <p:sp>
+        <p:nvSpPr>
+          <p:cNvPr id="35" name="标签">
+            <a:extLst>
+              <a:ext uri="{FF2B5EF4-FFF2-40B4-BE49-F238E27FC236}">
+                <a16:creationId xmlns:a16="http://schemas.microsoft.com/office/drawing/2014/main" id="{C36728FF-F9A5-A77A-CBA5-6474DC9EBED6}"/>
+              </a:ext>
+            </a:extLst>
+          </p:cNvPr>
+          <p:cNvSpPr/>
+          <p:nvPr/>
+        </p:nvSpPr>
+        <p:spPr>
+          <a:xfrm rot="18840000">
+            <a:off x="16789277" y="3475326"/>
+            <a:ext cx="577850" cy="257810"/>
+          </a:xfrm>
+          <a:custGeom>
+            <a:avLst/>
+            <a:gdLst>
+              <a:gd name="connsiteX0" fmla="*/ 0 w 466771"/>
+              <a:gd name="connsiteY0" fmla="*/ 98800 h 197600"/>
+              <a:gd name="connsiteX1" fmla="*/ 233386 w 466771"/>
+              <a:gd name="connsiteY1" fmla="*/ 0 h 197600"/>
+              <a:gd name="connsiteX2" fmla="*/ 466771 w 466771"/>
+              <a:gd name="connsiteY2" fmla="*/ 98800 h 197600"/>
+              <a:gd name="connsiteX3" fmla="*/ 233386 w 466771"/>
+              <a:gd name="connsiteY3" fmla="*/ 197600 h 197600"/>
+              <a:gd name="rtl" fmla="*/ 30400 w 466771"/>
+              <a:gd name="rtt" fmla="*/ 30400 h 197600"/>
+              <a:gd name="rtr" fmla="*/ 436372 w 466771"/>
+              <a:gd name="rtb" fmla="*/ 167200 h 197600"/>
+            </a:gdLst>
+            <a:ahLst/>
+            <a:cxnLst>
+              <a:cxn ang="10800000">
+                <a:pos x="connsiteX0" y="connsiteY0"/>
+              </a:cxn>
+              <a:cxn ang="16200000">
+                <a:pos x="connsiteX1" y="connsiteY1"/>
+              </a:cxn>
+              <a:cxn ang="0">
+                <a:pos x="connsiteX2" y="connsiteY2"/>
+              </a:cxn>
+              <a:cxn ang="5400000">
+                <a:pos x="connsiteX3" y="connsiteY3"/>
+              </a:cxn>
+            </a:cxnLst>
+            <a:rect l="rtl" t="rtt" r="rtr" b="rtb"/>
+            <a:pathLst>
+              <a:path w="466771" h="197600" stroke="0">
+                <a:moveTo>
+                  <a:pt x="35568" y="0"/>
+                </a:moveTo>
+                <a:lnTo>
+                  <a:pt x="431203" y="0"/>
+                </a:lnTo>
+                <a:cubicBezTo>
+                  <a:pt x="450848" y="0"/>
+                  <a:pt x="466771" y="15924"/>
+                  <a:pt x="466771" y="35568"/>
+                </a:cubicBezTo>
+                <a:lnTo>
+                  <a:pt x="466771" y="162032"/>
+                </a:lnTo>
+                <a:cubicBezTo>
+                  <a:pt x="466771" y="181676"/>
+                  <a:pt x="450848" y="197600"/>
+                  <a:pt x="431203" y="197600"/>
+                </a:cubicBezTo>
+                <a:lnTo>
+                  <a:pt x="35568" y="197600"/>
+                </a:lnTo>
+                <a:cubicBezTo>
+                  <a:pt x="15924" y="197600"/>
+                  <a:pt x="0" y="181676"/>
+                  <a:pt x="0" y="162032"/>
+                </a:cubicBezTo>
+                <a:lnTo>
+                  <a:pt x="0" y="35568"/>
+                </a:lnTo>
+                <a:cubicBezTo>
+                  <a:pt x="0" y="15924"/>
+                  <a:pt x="15924" y="0"/>
+                  <a:pt x="35568" y="0"/>
+                </a:cubicBezTo>
+                <a:close/>
+              </a:path>
+              <a:path w="466771" h="197600" fill="none">
+                <a:moveTo>
+                  <a:pt x="35568" y="0"/>
+                </a:moveTo>
+                <a:lnTo>
+                  <a:pt x="431203" y="0"/>
+                </a:lnTo>
+                <a:cubicBezTo>
+                  <a:pt x="450848" y="0"/>
+                  <a:pt x="466771" y="15924"/>
+                  <a:pt x="466771" y="35568"/>
+                </a:cubicBezTo>
+                <a:lnTo>
+                  <a:pt x="466771" y="162032"/>
+                </a:lnTo>
+                <a:cubicBezTo>
+                  <a:pt x="466771" y="181676"/>
+                  <a:pt x="450848" y="197600"/>
+                  <a:pt x="431203" y="197600"/>
+                </a:cubicBezTo>
+                <a:lnTo>
+                  <a:pt x="35568" y="197600"/>
+                </a:lnTo>
+                <a:cubicBezTo>
+                  <a:pt x="15924" y="197600"/>
+                  <a:pt x="0" y="181676"/>
+                  <a:pt x="0" y="162032"/>
+                </a:cubicBezTo>
+                <a:lnTo>
+                  <a:pt x="0" y="35568"/>
+                </a:lnTo>
+                <a:cubicBezTo>
+                  <a:pt x="0" y="15924"/>
+                  <a:pt x="15924" y="0"/>
+                  <a:pt x="35568" y="0"/>
+                </a:cubicBezTo>
+                <a:close/>
+              </a:path>
+            </a:pathLst>
+          </a:custGeom>
+          <a:solidFill>
+            <a:schemeClr val="accent4"/>
+          </a:solidFill>
+          <a:ln w="7600" cap="flat">
+            <a:solidFill>
+              <a:srgbClr val="4155C6"/>
+            </a:solidFill>
+            <a:miter/>
+          </a:ln>
+        </p:spPr>
+        <p:txBody>
+          <a:bodyPr wrap="square" lIns="76200" tIns="38100" rIns="76200" bIns="38100" rtlCol="0" anchor="ctr"/>
+          <a:lstStyle/>
+          <a:p>
+            <a:pPr algn="ctr"/>
+            <a:r>
+              <a:rPr lang="zh-CN" altLang="en-US" sz="1000" b="1" dirty="0">
+                <a:solidFill>
+                  <a:srgbClr val="191919"/>
+                </a:solidFill>
+                <a:latin typeface="微软雅黑" panose="020B0503020204020204" charset="-122"/>
+                <a:ea typeface="微软雅黑" panose="020B0503020204020204" charset="-122"/>
+                <a:cs typeface="微软雅黑" panose="020B0503020204020204" charset="-122"/>
+              </a:rPr>
+              <a:t>机北</a:t>
+            </a:r>
+            <a:r>
+              <a:rPr lang="en-US" altLang="zh-CN" sz="1000" b="1" dirty="0">
+                <a:solidFill>
+                  <a:srgbClr val="191919"/>
+                </a:solidFill>
+                <a:latin typeface="微软雅黑" panose="020B0503020204020204" charset="-122"/>
+                <a:ea typeface="微软雅黑" panose="020B0503020204020204" charset="-122"/>
+                <a:cs typeface="微软雅黑" panose="020B0503020204020204" charset="-122"/>
+              </a:rPr>
+              <a:t>2</a:t>
+            </a:r>
+          </a:p>
+        </p:txBody>
+      </p:sp>
     </p:spTree>
   </p:cSld>
   <p:clrMapOvr>

--- a/现场布局图.pptx
+++ b/现场布局图.pptx
@@ -244,7 +244,7 @@
           <a:p>
             <a:fld id="{06F60DB7-6E48-4466-B7A9-24611520A472}" type="datetimeFigureOut">
               <a:rPr lang="zh-CN" altLang="en-US" smtClean="0"/>
-              <a:t>2026/5/12</a:t>
+              <a:t>2026/5/21</a:t>
             </a:fld>
             <a:endParaRPr lang="zh-CN" altLang="en-US"/>
           </a:p>
@@ -414,7 +414,7 @@
           <a:p>
             <a:fld id="{06F60DB7-6E48-4466-B7A9-24611520A472}" type="datetimeFigureOut">
               <a:rPr lang="zh-CN" altLang="en-US" smtClean="0"/>
-              <a:t>2026/5/12</a:t>
+              <a:t>2026/5/21</a:t>
             </a:fld>
             <a:endParaRPr lang="zh-CN" altLang="en-US"/>
           </a:p>
@@ -594,7 +594,7 @@
           <a:p>
             <a:fld id="{06F60DB7-6E48-4466-B7A9-24611520A472}" type="datetimeFigureOut">
               <a:rPr lang="zh-CN" altLang="en-US" smtClean="0"/>
-              <a:t>2026/5/12</a:t>
+              <a:t>2026/5/21</a:t>
             </a:fld>
             <a:endParaRPr lang="zh-CN" altLang="en-US"/>
           </a:p>
@@ -764,7 +764,7 @@
           <a:p>
             <a:fld id="{06F60DB7-6E48-4466-B7A9-24611520A472}" type="datetimeFigureOut">
               <a:rPr lang="zh-CN" altLang="en-US" smtClean="0"/>
-              <a:t>2026/5/12</a:t>
+              <a:t>2026/5/21</a:t>
             </a:fld>
             <a:endParaRPr lang="zh-CN" altLang="en-US"/>
           </a:p>
@@ -1010,7 +1010,7 @@
           <a:p>
             <a:fld id="{06F60DB7-6E48-4466-B7A9-24611520A472}" type="datetimeFigureOut">
               <a:rPr lang="zh-CN" altLang="en-US" smtClean="0"/>
-              <a:t>2026/5/12</a:t>
+              <a:t>2026/5/21</a:t>
             </a:fld>
             <a:endParaRPr lang="zh-CN" altLang="en-US"/>
           </a:p>
@@ -1242,7 +1242,7 @@
           <a:p>
             <a:fld id="{06F60DB7-6E48-4466-B7A9-24611520A472}" type="datetimeFigureOut">
               <a:rPr lang="zh-CN" altLang="en-US" smtClean="0"/>
-              <a:t>2026/5/12</a:t>
+              <a:t>2026/5/21</a:t>
             </a:fld>
             <a:endParaRPr lang="zh-CN" altLang="en-US"/>
           </a:p>
@@ -1609,7 +1609,7 @@
           <a:p>
             <a:fld id="{06F60DB7-6E48-4466-B7A9-24611520A472}" type="datetimeFigureOut">
               <a:rPr lang="zh-CN" altLang="en-US" smtClean="0"/>
-              <a:t>2026/5/12</a:t>
+              <a:t>2026/5/21</a:t>
             </a:fld>
             <a:endParaRPr lang="zh-CN" altLang="en-US"/>
           </a:p>
@@ -1727,7 +1727,7 @@
           <a:p>
             <a:fld id="{06F60DB7-6E48-4466-B7A9-24611520A472}" type="datetimeFigureOut">
               <a:rPr lang="zh-CN" altLang="en-US" smtClean="0"/>
-              <a:t>2026/5/12</a:t>
+              <a:t>2026/5/21</a:t>
             </a:fld>
             <a:endParaRPr lang="zh-CN" altLang="en-US"/>
           </a:p>
@@ -1822,7 +1822,7 @@
           <a:p>
             <a:fld id="{06F60DB7-6E48-4466-B7A9-24611520A472}" type="datetimeFigureOut">
               <a:rPr lang="zh-CN" altLang="en-US" smtClean="0"/>
-              <a:t>2026/5/12</a:t>
+              <a:t>2026/5/21</a:t>
             </a:fld>
             <a:endParaRPr lang="zh-CN" altLang="en-US"/>
           </a:p>
@@ -2099,7 +2099,7 @@
           <a:p>
             <a:fld id="{06F60DB7-6E48-4466-B7A9-24611520A472}" type="datetimeFigureOut">
               <a:rPr lang="zh-CN" altLang="en-US" smtClean="0"/>
-              <a:t>2026/5/12</a:t>
+              <a:t>2026/5/21</a:t>
             </a:fld>
             <a:endParaRPr lang="zh-CN" altLang="en-US"/>
           </a:p>
@@ -2356,7 +2356,7 @@
           <a:p>
             <a:fld id="{06F60DB7-6E48-4466-B7A9-24611520A472}" type="datetimeFigureOut">
               <a:rPr lang="zh-CN" altLang="en-US" smtClean="0"/>
-              <a:t>2026/5/12</a:t>
+              <a:t>2026/5/21</a:t>
             </a:fld>
             <a:endParaRPr lang="zh-CN" altLang="en-US"/>
           </a:p>
@@ -2569,7 +2569,7 @@
           <a:p>
             <a:fld id="{06F60DB7-6E48-4466-B7A9-24611520A472}" type="datetimeFigureOut">
               <a:rPr lang="zh-CN" altLang="en-US" smtClean="0"/>
-              <a:t>2026/5/12</a:t>
+              <a:t>2026/5/21</a:t>
             </a:fld>
             <a:endParaRPr lang="zh-CN" altLang="en-US"/>
           </a:p>
@@ -2982,7 +2982,7 @@
         </p:nvGrpSpPr>
         <p:grpSpPr>
           <a:xfrm>
-            <a:off x="927472" y="-205105"/>
+            <a:off x="942186" y="-205105"/>
             <a:ext cx="18896965" cy="7268210"/>
             <a:chOff x="-10106" y="-239"/>
             <a:chExt cx="29759" cy="11446"/>
@@ -6239,7 +6239,7 @@
           </p:nvSpPr>
           <p:spPr>
             <a:xfrm>
-              <a:off x="8151" y="5281"/>
+              <a:off x="8141" y="5418"/>
               <a:ext cx="962" cy="342"/>
             </a:xfrm>
             <a:custGeom>
@@ -15763,7 +15763,7 @@
           </p:nvSpPr>
           <p:spPr>
             <a:xfrm rot="18780000">
-              <a:off x="18140" y="2809"/>
+              <a:off x="18430" y="2722"/>
               <a:ext cx="808" cy="406"/>
             </a:xfrm>
             <a:custGeom>
@@ -19304,17 +19304,14 @@
                 </a:rPr>
                 <a:t>4</a:t>
               </a:r>
-              <a:r>
-                <a:rPr lang="zh-CN" altLang="en-US" sz="1000" b="1" dirty="0">
-                  <a:solidFill>
-                    <a:srgbClr val="191919"/>
-                  </a:solidFill>
-                  <a:latin typeface="微软雅黑" panose="020B0503020204020204" charset="-122"/>
-                  <a:ea typeface="微软雅黑" panose="020B0503020204020204" charset="-122"/>
-                  <a:cs typeface="微软雅黑" panose="020B0503020204020204" charset="-122"/>
-                </a:rPr>
-                <a:t>内</a:t>
-              </a:r>
+              <a:endParaRPr lang="zh-CN" altLang="en-US" sz="1000" b="1" dirty="0">
+                <a:solidFill>
+                  <a:srgbClr val="191919"/>
+                </a:solidFill>
+                <a:latin typeface="微软雅黑" panose="020B0503020204020204" charset="-122"/>
+                <a:ea typeface="微软雅黑" panose="020B0503020204020204" charset="-122"/>
+                <a:cs typeface="微软雅黑" panose="020B0503020204020204" charset="-122"/>
+              </a:endParaRPr>
             </a:p>
           </p:txBody>
         </p:sp>
@@ -19650,17 +19647,14 @@
                 </a:rPr>
                 <a:t>3</a:t>
               </a:r>
-              <a:r>
-                <a:rPr lang="zh-CN" altLang="en-US" sz="1000" b="1" dirty="0">
-                  <a:solidFill>
-                    <a:srgbClr val="191919"/>
-                  </a:solidFill>
-                  <a:latin typeface="微软雅黑" panose="020B0503020204020204" charset="-122"/>
-                  <a:ea typeface="微软雅黑" panose="020B0503020204020204" charset="-122"/>
-                  <a:cs typeface="微软雅黑" panose="020B0503020204020204" charset="-122"/>
-                </a:rPr>
-                <a:t>内</a:t>
-              </a:r>
+              <a:endParaRPr lang="zh-CN" altLang="en-US" sz="1000" b="1" dirty="0">
+                <a:solidFill>
+                  <a:srgbClr val="191919"/>
+                </a:solidFill>
+                <a:latin typeface="微软雅黑" panose="020B0503020204020204" charset="-122"/>
+                <a:ea typeface="微软雅黑" panose="020B0503020204020204" charset="-122"/>
+                <a:cs typeface="微软雅黑" panose="020B0503020204020204" charset="-122"/>
+              </a:endParaRPr>
             </a:p>
           </p:txBody>
         </p:sp>
@@ -19823,17 +19817,14 @@
                 </a:rPr>
                 <a:t>2</a:t>
               </a:r>
-              <a:r>
-                <a:rPr lang="zh-CN" altLang="en-US" sz="1000" b="1" dirty="0">
-                  <a:solidFill>
-                    <a:srgbClr val="191919"/>
-                  </a:solidFill>
-                  <a:latin typeface="微软雅黑" panose="020B0503020204020204" charset="-122"/>
-                  <a:ea typeface="微软雅黑" panose="020B0503020204020204" charset="-122"/>
-                  <a:cs typeface="微软雅黑" panose="020B0503020204020204" charset="-122"/>
-                </a:rPr>
-                <a:t>内</a:t>
-              </a:r>
+              <a:endParaRPr lang="zh-CN" altLang="en-US" sz="1000" b="1" dirty="0">
+                <a:solidFill>
+                  <a:srgbClr val="191919"/>
+                </a:solidFill>
+                <a:latin typeface="微软雅黑" panose="020B0503020204020204" charset="-122"/>
+                <a:ea typeface="微软雅黑" panose="020B0503020204020204" charset="-122"/>
+                <a:cs typeface="微软雅黑" panose="020B0503020204020204" charset="-122"/>
+              </a:endParaRPr>
             </a:p>
           </p:txBody>
         </p:sp>
@@ -19996,17 +19987,14 @@
                 </a:rPr>
                 <a:t>1</a:t>
               </a:r>
-              <a:r>
-                <a:rPr lang="zh-CN" altLang="en-US" sz="1000" b="1" dirty="0">
-                  <a:solidFill>
-                    <a:srgbClr val="191919"/>
-                  </a:solidFill>
-                  <a:latin typeface="微软雅黑" panose="020B0503020204020204" charset="-122"/>
-                  <a:ea typeface="微软雅黑" panose="020B0503020204020204" charset="-122"/>
-                  <a:cs typeface="微软雅黑" panose="020B0503020204020204" charset="-122"/>
-                </a:rPr>
-                <a:t>内</a:t>
-              </a:r>
+              <a:endParaRPr lang="zh-CN" altLang="en-US" sz="1000" b="1" dirty="0">
+                <a:solidFill>
+                  <a:srgbClr val="191919"/>
+                </a:solidFill>
+                <a:latin typeface="微软雅黑" panose="020B0503020204020204" charset="-122"/>
+                <a:ea typeface="微软雅黑" panose="020B0503020204020204" charset="-122"/>
+                <a:cs typeface="微软雅黑" panose="020B0503020204020204" charset="-122"/>
+              </a:endParaRPr>
             </a:p>
           </p:txBody>
         </p:sp>
@@ -24985,7 +24973,7 @@
                 <a:ea typeface="微软雅黑" panose="020B0503020204020204" charset="-122"/>
                 <a:cs typeface="微软雅黑" panose="020B0503020204020204" charset="-122"/>
               </a:rPr>
-              <a:t>190</a:t>
+              <a:t>68</a:t>
             </a:r>
             <a:r>
               <a:rPr lang="zh-CN" altLang="en-US" sz="685" dirty="0">
@@ -45635,17 +45623,14 @@
                 </a:rPr>
                 <a:t>4</a:t>
               </a:r>
-              <a:r>
-                <a:rPr lang="zh-CN" altLang="en-US" sz="1000" b="1" dirty="0">
-                  <a:solidFill>
-                    <a:srgbClr val="191919"/>
-                  </a:solidFill>
-                  <a:latin typeface="微软雅黑" panose="020B0503020204020204" charset="-122"/>
-                  <a:ea typeface="微软雅黑" panose="020B0503020204020204" charset="-122"/>
-                  <a:cs typeface="微软雅黑" panose="020B0503020204020204" charset="-122"/>
-                </a:rPr>
-                <a:t>内</a:t>
-              </a:r>
+              <a:endParaRPr lang="zh-CN" altLang="en-US" sz="1000" b="1" dirty="0">
+                <a:solidFill>
+                  <a:srgbClr val="191919"/>
+                </a:solidFill>
+                <a:latin typeface="微软雅黑" panose="020B0503020204020204" charset="-122"/>
+                <a:ea typeface="微软雅黑" panose="020B0503020204020204" charset="-122"/>
+                <a:cs typeface="微软雅黑" panose="020B0503020204020204" charset="-122"/>
+              </a:endParaRPr>
             </a:p>
           </p:txBody>
         </p:sp>
@@ -45993,17 +45978,14 @@
                 </a:rPr>
                 <a:t>3</a:t>
               </a:r>
-              <a:r>
-                <a:rPr lang="zh-CN" altLang="en-US" sz="1000" b="1" dirty="0">
-                  <a:solidFill>
-                    <a:srgbClr val="191919"/>
-                  </a:solidFill>
-                  <a:latin typeface="微软雅黑" panose="020B0503020204020204" charset="-122"/>
-                  <a:ea typeface="微软雅黑" panose="020B0503020204020204" charset="-122"/>
-                  <a:cs typeface="微软雅黑" panose="020B0503020204020204" charset="-122"/>
-                </a:rPr>
-                <a:t>内</a:t>
-              </a:r>
+              <a:endParaRPr lang="zh-CN" altLang="en-US" sz="1000" b="1" dirty="0">
+                <a:solidFill>
+                  <a:srgbClr val="191919"/>
+                </a:solidFill>
+                <a:latin typeface="微软雅黑" panose="020B0503020204020204" charset="-122"/>
+                <a:ea typeface="微软雅黑" panose="020B0503020204020204" charset="-122"/>
+                <a:cs typeface="微软雅黑" panose="020B0503020204020204" charset="-122"/>
+              </a:endParaRPr>
             </a:p>
           </p:txBody>
         </p:sp>

--- a/现场布局图.pptx
+++ b/现场布局图.pptx
@@ -244,7 +244,7 @@
           <a:p>
             <a:fld id="{06F60DB7-6E48-4466-B7A9-24611520A472}" type="datetimeFigureOut">
               <a:rPr lang="zh-CN" altLang="en-US" smtClean="0"/>
-              <a:t>2026/5/21</a:t>
+              <a:t>2026/5/23</a:t>
             </a:fld>
             <a:endParaRPr lang="zh-CN" altLang="en-US"/>
           </a:p>
@@ -414,7 +414,7 @@
           <a:p>
             <a:fld id="{06F60DB7-6E48-4466-B7A9-24611520A472}" type="datetimeFigureOut">
               <a:rPr lang="zh-CN" altLang="en-US" smtClean="0"/>
-              <a:t>2026/5/21</a:t>
+              <a:t>2026/5/23</a:t>
             </a:fld>
             <a:endParaRPr lang="zh-CN" altLang="en-US"/>
           </a:p>
@@ -594,7 +594,7 @@
           <a:p>
             <a:fld id="{06F60DB7-6E48-4466-B7A9-24611520A472}" type="datetimeFigureOut">
               <a:rPr lang="zh-CN" altLang="en-US" smtClean="0"/>
-              <a:t>2026/5/21</a:t>
+              <a:t>2026/5/23</a:t>
             </a:fld>
             <a:endParaRPr lang="zh-CN" altLang="en-US"/>
           </a:p>
@@ -764,7 +764,7 @@
           <a:p>
             <a:fld id="{06F60DB7-6E48-4466-B7A9-24611520A472}" type="datetimeFigureOut">
               <a:rPr lang="zh-CN" altLang="en-US" smtClean="0"/>
-              <a:t>2026/5/21</a:t>
+              <a:t>2026/5/23</a:t>
             </a:fld>
             <a:endParaRPr lang="zh-CN" altLang="en-US"/>
           </a:p>
@@ -1010,7 +1010,7 @@
           <a:p>
             <a:fld id="{06F60DB7-6E48-4466-B7A9-24611520A472}" type="datetimeFigureOut">
               <a:rPr lang="zh-CN" altLang="en-US" smtClean="0"/>
-              <a:t>2026/5/21</a:t>
+              <a:t>2026/5/23</a:t>
             </a:fld>
             <a:endParaRPr lang="zh-CN" altLang="en-US"/>
           </a:p>
@@ -1242,7 +1242,7 @@
           <a:p>
             <a:fld id="{06F60DB7-6E48-4466-B7A9-24611520A472}" type="datetimeFigureOut">
               <a:rPr lang="zh-CN" altLang="en-US" smtClean="0"/>
-              <a:t>2026/5/21</a:t>
+              <a:t>2026/5/23</a:t>
             </a:fld>
             <a:endParaRPr lang="zh-CN" altLang="en-US"/>
           </a:p>
@@ -1609,7 +1609,7 @@
           <a:p>
             <a:fld id="{06F60DB7-6E48-4466-B7A9-24611520A472}" type="datetimeFigureOut">
               <a:rPr lang="zh-CN" altLang="en-US" smtClean="0"/>
-              <a:t>2026/5/21</a:t>
+              <a:t>2026/5/23</a:t>
             </a:fld>
             <a:endParaRPr lang="zh-CN" altLang="en-US"/>
           </a:p>
@@ -1727,7 +1727,7 @@
           <a:p>
             <a:fld id="{06F60DB7-6E48-4466-B7A9-24611520A472}" type="datetimeFigureOut">
               <a:rPr lang="zh-CN" altLang="en-US" smtClean="0"/>
-              <a:t>2026/5/21</a:t>
+              <a:t>2026/5/23</a:t>
             </a:fld>
             <a:endParaRPr lang="zh-CN" altLang="en-US"/>
           </a:p>
@@ -1822,7 +1822,7 @@
           <a:p>
             <a:fld id="{06F60DB7-6E48-4466-B7A9-24611520A472}" type="datetimeFigureOut">
               <a:rPr lang="zh-CN" altLang="en-US" smtClean="0"/>
-              <a:t>2026/5/21</a:t>
+              <a:t>2026/5/23</a:t>
             </a:fld>
             <a:endParaRPr lang="zh-CN" altLang="en-US"/>
           </a:p>
@@ -2099,7 +2099,7 @@
           <a:p>
             <a:fld id="{06F60DB7-6E48-4466-B7A9-24611520A472}" type="datetimeFigureOut">
               <a:rPr lang="zh-CN" altLang="en-US" smtClean="0"/>
-              <a:t>2026/5/21</a:t>
+              <a:t>2026/5/23</a:t>
             </a:fld>
             <a:endParaRPr lang="zh-CN" altLang="en-US"/>
           </a:p>
@@ -2356,7 +2356,7 @@
           <a:p>
             <a:fld id="{06F60DB7-6E48-4466-B7A9-24611520A472}" type="datetimeFigureOut">
               <a:rPr lang="zh-CN" altLang="en-US" smtClean="0"/>
-              <a:t>2026/5/21</a:t>
+              <a:t>2026/5/23</a:t>
             </a:fld>
             <a:endParaRPr lang="zh-CN" altLang="en-US"/>
           </a:p>
@@ -2569,7 +2569,7 @@
           <a:p>
             <a:fld id="{06F60DB7-6E48-4466-B7A9-24611520A472}" type="datetimeFigureOut">
               <a:rPr lang="zh-CN" altLang="en-US" smtClean="0"/>
-              <a:t>2026/5/21</a:t>
+              <a:t>2026/5/23</a:t>
             </a:fld>
             <a:endParaRPr lang="zh-CN" altLang="en-US"/>
           </a:p>
@@ -24973,7 +24973,7 @@
                 <a:ea typeface="微软雅黑" panose="020B0503020204020204" charset="-122"/>
                 <a:cs typeface="微软雅黑" panose="020B0503020204020204" charset="-122"/>
               </a:rPr>
-              <a:t>68</a:t>
+              <a:t>57</a:t>
             </a:r>
             <a:r>
               <a:rPr lang="zh-CN" altLang="en-US" sz="685" dirty="0">

--- a/现场布局图.pptx
+++ b/现场布局图.pptx
@@ -244,7 +244,7 @@
           <a:p>
             <a:fld id="{06F60DB7-6E48-4466-B7A9-24611520A472}" type="datetimeFigureOut">
               <a:rPr lang="zh-CN" altLang="en-US" smtClean="0"/>
-              <a:t>2026/5/23</a:t>
+              <a:t>2026/5/29</a:t>
             </a:fld>
             <a:endParaRPr lang="zh-CN" altLang="en-US"/>
           </a:p>
@@ -414,7 +414,7 @@
           <a:p>
             <a:fld id="{06F60DB7-6E48-4466-B7A9-24611520A472}" type="datetimeFigureOut">
               <a:rPr lang="zh-CN" altLang="en-US" smtClean="0"/>
-              <a:t>2026/5/23</a:t>
+              <a:t>2026/5/29</a:t>
             </a:fld>
             <a:endParaRPr lang="zh-CN" altLang="en-US"/>
           </a:p>
@@ -594,7 +594,7 @@
           <a:p>
             <a:fld id="{06F60DB7-6E48-4466-B7A9-24611520A472}" type="datetimeFigureOut">
               <a:rPr lang="zh-CN" altLang="en-US" smtClean="0"/>
-              <a:t>2026/5/23</a:t>
+              <a:t>2026/5/29</a:t>
             </a:fld>
             <a:endParaRPr lang="zh-CN" altLang="en-US"/>
           </a:p>
@@ -764,7 +764,7 @@
           <a:p>
             <a:fld id="{06F60DB7-6E48-4466-B7A9-24611520A472}" type="datetimeFigureOut">
               <a:rPr lang="zh-CN" altLang="en-US" smtClean="0"/>
-              <a:t>2026/5/23</a:t>
+              <a:t>2026/5/29</a:t>
             </a:fld>
             <a:endParaRPr lang="zh-CN" altLang="en-US"/>
           </a:p>
@@ -1010,7 +1010,7 @@
           <a:p>
             <a:fld id="{06F60DB7-6E48-4466-B7A9-24611520A472}" type="datetimeFigureOut">
               <a:rPr lang="zh-CN" altLang="en-US" smtClean="0"/>
-              <a:t>2026/5/23</a:t>
+              <a:t>2026/5/29</a:t>
             </a:fld>
             <a:endParaRPr lang="zh-CN" altLang="en-US"/>
           </a:p>
@@ -1242,7 +1242,7 @@
           <a:p>
             <a:fld id="{06F60DB7-6E48-4466-B7A9-24611520A472}" type="datetimeFigureOut">
               <a:rPr lang="zh-CN" altLang="en-US" smtClean="0"/>
-              <a:t>2026/5/23</a:t>
+              <a:t>2026/5/29</a:t>
             </a:fld>
             <a:endParaRPr lang="zh-CN" altLang="en-US"/>
           </a:p>
@@ -1609,7 +1609,7 @@
           <a:p>
             <a:fld id="{06F60DB7-6E48-4466-B7A9-24611520A472}" type="datetimeFigureOut">
               <a:rPr lang="zh-CN" altLang="en-US" smtClean="0"/>
-              <a:t>2026/5/23</a:t>
+              <a:t>2026/5/29</a:t>
             </a:fld>
             <a:endParaRPr lang="zh-CN" altLang="en-US"/>
           </a:p>
@@ -1727,7 +1727,7 @@
           <a:p>
             <a:fld id="{06F60DB7-6E48-4466-B7A9-24611520A472}" type="datetimeFigureOut">
               <a:rPr lang="zh-CN" altLang="en-US" smtClean="0"/>
-              <a:t>2026/5/23</a:t>
+              <a:t>2026/5/29</a:t>
             </a:fld>
             <a:endParaRPr lang="zh-CN" altLang="en-US"/>
           </a:p>
@@ -1822,7 +1822,7 @@
           <a:p>
             <a:fld id="{06F60DB7-6E48-4466-B7A9-24611520A472}" type="datetimeFigureOut">
               <a:rPr lang="zh-CN" altLang="en-US" smtClean="0"/>
-              <a:t>2026/5/23</a:t>
+              <a:t>2026/5/29</a:t>
             </a:fld>
             <a:endParaRPr lang="zh-CN" altLang="en-US"/>
           </a:p>
@@ -2099,7 +2099,7 @@
           <a:p>
             <a:fld id="{06F60DB7-6E48-4466-B7A9-24611520A472}" type="datetimeFigureOut">
               <a:rPr lang="zh-CN" altLang="en-US" smtClean="0"/>
-              <a:t>2026/5/23</a:t>
+              <a:t>2026/5/29</a:t>
             </a:fld>
             <a:endParaRPr lang="zh-CN" altLang="en-US"/>
           </a:p>
@@ -2356,7 +2356,7 @@
           <a:p>
             <a:fld id="{06F60DB7-6E48-4466-B7A9-24611520A472}" type="datetimeFigureOut">
               <a:rPr lang="zh-CN" altLang="en-US" smtClean="0"/>
-              <a:t>2026/5/23</a:t>
+              <a:t>2026/5/29</a:t>
             </a:fld>
             <a:endParaRPr lang="zh-CN" altLang="en-US"/>
           </a:p>
@@ -2569,7 +2569,7 @@
           <a:p>
             <a:fld id="{06F60DB7-6E48-4466-B7A9-24611520A472}" type="datetimeFigureOut">
               <a:rPr lang="zh-CN" altLang="en-US" smtClean="0"/>
-              <a:t>2026/5/23</a:t>
+              <a:t>2026/5/29</a:t>
             </a:fld>
             <a:endParaRPr lang="zh-CN" altLang="en-US"/>
           </a:p>
